--- a/slides/Delphi13-light.pptx
+++ b/slides/Delphi13-light.pptx
@@ -217,7 +217,7 @@
           <a:p>
             <a:fld id="{EE3DB809-9F65-47C2-BD1A-7C89CA7E5A22}" type="datetimeFigureOut">
               <a:rPr lang="en-US" smtClean="0"/>
-              <a:t>4/24/2026</a:t>
+              <a:t>4/25/2026</a:t>
             </a:fld>
             <a:endParaRPr lang="en-US"/>
           </a:p>
@@ -6728,17 +6728,73 @@
           <a:chExt cx="0" cy="0"/>
         </a:xfrm>
       </p:grpSpPr>
+      <p:sp>
+        <p:nvSpPr>
+          <p:cNvPr id="2" name="Date Placeholder 1">
+            <a:extLst>
+              <a:ext uri="{FF2B5EF4-FFF2-40B4-BE49-F238E27FC236}">
+                <a16:creationId xmlns:a16="http://schemas.microsoft.com/office/drawing/2014/main" id="{A66296A6-094A-A96C-1CF9-CB6E2FD8DE42}"/>
+              </a:ext>
+            </a:extLst>
+          </p:cNvPr>
+          <p:cNvSpPr>
+            <a:spLocks noGrp="1"/>
+          </p:cNvSpPr>
+          <p:nvPr>
+            <p:ph type="dt" sz="half" idx="10"/>
+          </p:nvPr>
+        </p:nvSpPr>
+        <p:spPr/>
+        <p:txBody>
+          <a:bodyPr/>
+          <a:lstStyle/>
+          <a:p>
+            <a:r>
+              <a:rPr lang="en-US"/>
+              <a:t>2026-05-02</a:t>
+            </a:r>
+          </a:p>
+        </p:txBody>
+      </p:sp>
+      <p:sp>
+        <p:nvSpPr>
+          <p:cNvPr id="4" name="Footer Placeholder 3">
+            <a:extLst>
+              <a:ext uri="{FF2B5EF4-FFF2-40B4-BE49-F238E27FC236}">
+                <a16:creationId xmlns:a16="http://schemas.microsoft.com/office/drawing/2014/main" id="{87882E3A-799C-522D-28D5-DEB5EB1B1802}"/>
+              </a:ext>
+            </a:extLst>
+          </p:cNvPr>
+          <p:cNvSpPr>
+            <a:spLocks noGrp="1"/>
+          </p:cNvSpPr>
+          <p:nvPr>
+            <p:ph type="ftr" sz="quarter" idx="11"/>
+          </p:nvPr>
+        </p:nvSpPr>
+        <p:spPr/>
+        <p:txBody>
+          <a:bodyPr/>
+          <a:lstStyle/>
+          <a:p>
+            <a:r>
+              <a:rPr lang="en-US"/>
+              <a:t>Progress bar</a:t>
+            </a:r>
+          </a:p>
+        </p:txBody>
+      </p:sp>
       <p:pic>
         <p:nvPicPr>
-          <p:cNvPr id="3" name="Picture 2">
-            <a:extLst>
-              <a:ext uri="{FF2B5EF4-FFF2-40B4-BE49-F238E27FC236}">
-                <a16:creationId xmlns:a16="http://schemas.microsoft.com/office/drawing/2014/main" id="{0BBFBDC3-B8B9-84D5-20FA-EE0ACE293AB4}"/>
+          <p:cNvPr id="5" name="Picture 4">
+            <a:extLst>
+              <a:ext uri="{FF2B5EF4-FFF2-40B4-BE49-F238E27FC236}">
+                <a16:creationId xmlns:a16="http://schemas.microsoft.com/office/drawing/2014/main" id="{72D03634-4110-865B-86BB-072C635FA9BB}"/>
               </a:ext>
             </a:extLst>
           </p:cNvPr>
           <p:cNvPicPr>
-            <a:picLocks noGrp="1" noRot="1" noChangeAspect="1" noMove="1" noResize="1" noEditPoints="1" noAdjustHandles="1" noChangeArrowheads="1" noChangeShapeType="1" noCrop="1"/>
+            <a:picLocks noChangeAspect="1"/>
           </p:cNvPicPr>
           <p:nvPr/>
         </p:nvPicPr>
@@ -6764,62 +6820,6 @@
           </a:prstGeom>
         </p:spPr>
       </p:pic>
-      <p:sp>
-        <p:nvSpPr>
-          <p:cNvPr id="2" name="Date Placeholder 1">
-            <a:extLst>
-              <a:ext uri="{FF2B5EF4-FFF2-40B4-BE49-F238E27FC236}">
-                <a16:creationId xmlns:a16="http://schemas.microsoft.com/office/drawing/2014/main" id="{A66296A6-094A-A96C-1CF9-CB6E2FD8DE42}"/>
-              </a:ext>
-            </a:extLst>
-          </p:cNvPr>
-          <p:cNvSpPr>
-            <a:spLocks noGrp="1"/>
-          </p:cNvSpPr>
-          <p:nvPr>
-            <p:ph type="dt" sz="half" idx="10"/>
-          </p:nvPr>
-        </p:nvSpPr>
-        <p:spPr/>
-        <p:txBody>
-          <a:bodyPr/>
-          <a:lstStyle/>
-          <a:p>
-            <a:r>
-              <a:rPr lang="en-US"/>
-              <a:t>2026-05-02</a:t>
-            </a:r>
-          </a:p>
-        </p:txBody>
-      </p:sp>
-      <p:sp>
-        <p:nvSpPr>
-          <p:cNvPr id="4" name="Footer Placeholder 3">
-            <a:extLst>
-              <a:ext uri="{FF2B5EF4-FFF2-40B4-BE49-F238E27FC236}">
-                <a16:creationId xmlns:a16="http://schemas.microsoft.com/office/drawing/2014/main" id="{87882E3A-799C-522D-28D5-DEB5EB1B1802}"/>
-              </a:ext>
-            </a:extLst>
-          </p:cNvPr>
-          <p:cNvSpPr>
-            <a:spLocks noGrp="1"/>
-          </p:cNvSpPr>
-          <p:nvPr>
-            <p:ph type="ftr" sz="quarter" idx="11"/>
-          </p:nvPr>
-        </p:nvSpPr>
-        <p:spPr/>
-        <p:txBody>
-          <a:bodyPr/>
-          <a:lstStyle/>
-          <a:p>
-            <a:r>
-              <a:rPr lang="en-US"/>
-              <a:t>Progress bar</a:t>
-            </a:r>
-          </a:p>
-        </p:txBody>
-      </p:sp>
     </p:spTree>
     <p:extLst>
       <p:ext uri="{BB962C8B-B14F-4D97-AF65-F5344CB8AC3E}">
